--- a/Base/Tema7_Verifica_output_pensiero_critico.pptx
+++ b/Base/Tema7_Verifica_output_pensiero_critico.pptx
@@ -78,9 +78,10 @@
     <p:sldId id="326" r:id="rId72"/>
     <p:sldId id="327" r:id="rId73"/>
     <p:sldId id="328" r:id="rId74"/>
+    <p:sldId id="329" r:id="rId75"/>
   </p:sldIdLst>
   <p:notesMasterIdLst>
-    <p:notesMasterId r:id="rId75"/>
+    <p:notesMasterId r:id="rId76"/>
   </p:notesMasterIdLst>
   <p:sldSz cx="9144000" cy="5143500"/>
   <p:notesSz cx="5143500" cy="9144000"/>
@@ -179,7 +180,7 @@
   <p:extLst>
     <p:ext uri="{521415D9-36F7-43E2-AB2F-B90AF26B5E84}">
       <p14:sectionLst xmlns:p14="http://schemas.microsoft.com/office/powerpoint/2010/main">
-        <p14:section name="Introduzione" id="{230ef4b0-e6be-3bf2-81c9-66a350da1895}">
+        <p14:section name="Introduzione" id="{5e45e51a-12d1-3b41-5dfe-ecc583431097}">
           <p14:sldIdLst>
             <p14:sldId id="256"/>
             <p14:sldId id="257"/>
@@ -188,7 +189,7 @@
             <p14:sldId id="260"/>
           </p14:sldIdLst>
         </p14:section>
-        <p14:section name="7.1 Pensiero critico" id="{11bf5c59-0598-ae90-d116-c43b974e0b27}">
+        <p14:section name="7.1 Pensiero critico" id="{7272d2bb-9cb5-e090-0808-32279aa0655f}">
           <p14:sldIdLst>
             <p14:sldId id="261"/>
             <p14:sldId id="262"/>
@@ -200,7 +201,7 @@
             <p14:sldId id="268"/>
           </p14:sldIdLst>
         </p14:section>
-        <p14:section name="7.2 Qualità di un output" id="{ba6f53e5-118b-6443-f7d5-daf444efaf03}">
+        <p14:section name="7.2 Qualità di un output" id="{e2970062-f0e9-b981-3874-09b99805f922}">
           <p14:sldIdLst>
             <p14:sldId id="269"/>
             <p14:sldId id="270"/>
@@ -212,7 +213,7 @@
             <p14:sldId id="276"/>
           </p14:sldIdLst>
         </p14:section>
-        <p14:section name="7.3 Informazioni e fonti" id="{9eb8039d-c4e9-1088-f890-0e23d881bf05}">
+        <p14:section name="7.3 Informazioni e fonti" id="{5cb38e00-1656-3d7c-bac6-f5d049a83d15}">
           <p14:sldIdLst>
             <p14:sldId id="277"/>
             <p14:sldId id="278"/>
@@ -224,7 +225,7 @@
             <p14:sldId id="284"/>
           </p14:sldIdLst>
         </p14:section>
-        <p14:section name="7.4 Ragionamenti e conclusioni" id="{49a99feb-cc81-cc50-3d51-9d9adce15809}">
+        <p14:section name="7.4 Ragionamenti e conclusioni" id="{8cf74f21-3952-4c01-eb68-c90a0a413e18}">
           <p14:sldIdLst>
             <p14:sldId id="285"/>
             <p14:sldId id="286"/>
@@ -236,7 +237,7 @@
             <p14:sldId id="292"/>
           </p14:sldIdLst>
         </p14:section>
-        <p14:section name="7.5 Dati e calcoli" id="{5dd5e174-b0a8-d148-aa0d-0ee9d5a36aeb}">
+        <p14:section name="7.5 Dati e calcoli" id="{dffeef24-3a1f-a972-7648-bc704b3d4307}">
           <p14:sldIdLst>
             <p14:sldId id="293"/>
             <p14:sldId id="294"/>
@@ -248,7 +249,7 @@
             <p14:sldId id="300"/>
           </p14:sldIdLst>
         </p14:section>
-        <p14:section name="7.6 Revisione assistita dall'AI" id="{286ef332-0b94-8d83-bff1-bbb7cafe098b}">
+        <p14:section name="7.6 Revisione assistita dall'AI" id="{59e3288b-64eb-1ec6-c5b0-eb30596905e0}">
           <p14:sldIdLst>
             <p14:sldId id="301"/>
             <p14:sldId id="302"/>
@@ -259,7 +260,7 @@
             <p14:sldId id="307"/>
           </p14:sldIdLst>
         </p14:section>
-        <p14:section name="7.7 Bias cognitivi" id="{191946cd-5220-5f5a-15ab-517b0f056eea}">
+        <p14:section name="7.7 Bias cognitivi" id="{c4bea194-3088-6960-8046-1c6511e88c37}">
           <p14:sldIdLst>
             <p14:sldId id="308"/>
             <p14:sldId id="309"/>
@@ -270,7 +271,7 @@
             <p14:sldId id="314"/>
           </p14:sldIdLst>
         </p14:section>
-        <p14:section name="7.8 Validazione e responsabilità" id="{27d32de7-773e-e786-204a-241b939af83d}">
+        <p14:section name="7.8 Validazione e responsabilità" id="{46401c4f-a047-ad0d-9a67-6021403dab62}">
           <p14:sldIdLst>
             <p14:sldId id="315"/>
             <p14:sldId id="316"/>
@@ -283,13 +284,14 @@
             <p14:sldId id="323"/>
           </p14:sldIdLst>
         </p14:section>
-        <p14:section name="Conclusioni" id="{9556df72-9ecb-c679-c75c-1894aaa40303}">
+        <p14:section name="Conclusioni" id="{92aa3d93-f9d1-2495-b2d8-5793e5b86cc8}">
           <p14:sldIdLst>
             <p14:sldId id="324"/>
             <p14:sldId id="325"/>
             <p14:sldId id="326"/>
             <p14:sldId id="327"/>
             <p14:sldId id="328"/>
+            <p14:sldId id="329"/>
           </p14:sldIdLst>
         </p14:section>
       </p14:sectionLst>
@@ -1226,7 +1228,7 @@
           <a:p>
             <a:r>
               <a:rPr lang="en-US" dirty="0"/>
-              <a:t>Benvenuti al settimo tema, che completa l'area 'Interagire con l'AI'. Nel Tema 5 abbiamo visto il dialogo e la collaborazione con l'AI, nel Tema 6 come formulare richieste efficaci. Più volte abbiamo rimandato a questo tema una fase essenziale: la verifica. Un buon prompt migliora l'aderenza alla richiesta, ma non garantisce la correttezza. Qui sviluppiamo i metodi pratici per valutare criticamente un output, verificare informazioni, fonti, ragionamenti e numeri, usare l'AI come supporto alla revisione senza confondere autoverifica e verifica indipendente, riconoscere i nostri bias e, infine, decidere se un risultato è adeguato all'uso previsto. Non ripetiamo la teoria degli errori del Tema 3: qui ci concentriamo su come riconoscerli e gestirli. Suggerimento per l'apertura: mostrare ai partecipanti un breve testo prodotto dall'AI, ben scritto e con un errore non evidente, e chiedere se lo userebbero così com'è. La discussione introduce bene tutto il modulo.</a:t>
+              <a:t>Benvenuti al settimo tema, che completa l'area 'Interagire con l'AI'. Nel Tema 5 abbiamo visto il dialogo e la collaborazione con l'AI, nel Tema 6 come formulare richieste efficaci. Più volte abbiamo rimandato a questo tema una fase essenziale: la verifica. Un buon prompt migliora l'aderenza alla richiesta, ma non garantisce la correttezza. Qui sviluppiamo i metodi pratici per valutare criticamente un output, verificare informazioni, fonti, ragionamenti e numeri, usare l'AI come supporto alla revisione senza confondere autoverifica e verifica indipendente, riconoscere i nostri bias e, infine, decidere se un risultato è adeguato all'uso previsto. Non ripetiamo la teoria degli errori del Tema 3: qui ci concentriamo su come riconoscerli e gestirli. Suggerimento per l'apertura: mostrare ai partecipanti un breve testo prodotto dall'AI, ben scritto e con un errore non evidente, e chiedere se lo userebbero così com'è. La discussione introduce bene tutto il modulo. Nota per il relatore: i contenuti e le fonti sono stati verificati a ottobre 2026; il modulo si basa su principi stabili, ma gli studi sull'efficacia della revisione assistita dall'AI sono in rapida evoluzione e vanno ricontrollati prima di ogni edizione.</a:t>
             </a:r>
             <a:endParaRPr lang="en-US" dirty="0"/>
           </a:p>
@@ -5098,7 +5100,7 @@
           <a:p>
             <a:r>
               <a:rPr lang="en-US" dirty="0"/>
-              <a:t>Il modulo è articolato in otto sottotemi, tutti con priorità alta e tutti mantenuti distinti. Vanno compresi e applicati: la valutazione della qualità, la verifica delle fonti, il controllo dei ragionamenti, l'identificazione delle omissioni e la validazione proporzionata al rischio. Vanno conosciuti e sperimentati: le tecniche di revisione assistita dall'AI, il confronto tra modelli, la verifica quantitativa, il riconoscimento dei bias cognitivi e la gestione dell'incertezza. Vanno solo accennati: metriche statistiche avanzate, validazione formale dei sistemi, modelli quantitativi di rischio, audit specialistici e valutazioni su larga scala. Confini: non ripetiamo i meccanismi del Tema 2, né la teoria di allucinazioni e bias del Tema 3, né le dinamiche di collaborazione e delega cognitiva del Tema 5, né i metodi di formulazione del Tema 6, salvo le richieste usate come supporto al controllo. Non sviluppiamo ROI né obblighi giuridici: la responsabilità è trattata come consapevolezza operativa.</a:t>
+              <a:t>Il modulo è articolato in otto sottotemi, tutti con priorità alta e tutti mantenuti distinti. Vanno compresi e applicati: la valutazione della qualità, la verifica delle fonti, il controllo dei ragionamenti, l'identificazione delle omissioni e la validazione proporzionata al rischio. Vanno conosciuti e sperimentati: le tecniche di revisione assistita dall'AI, il confronto tra modelli, la verifica quantitativa, il riconoscimento dei bias cognitivi e la gestione dell'incertezza. Vanno solo accennati: metriche statistiche avanzate, validazione formale dei sistemi, modelli quantitativi di rischio, audit specialistici e valutazioni su larga scala. Confini: non ripetiamo i meccanismi del Tema 2, né la teoria di allucinazioni e bias del Tema 3, né le dinamiche di collaborazione e delega cognitiva del Tema 5, né i metodi di formulazione del Tema 6, salvo le richieste usate come supporto al controllo. Non sviluppiamo ROI né obblighi giuridici, trattati nei Temi 12 e 18: la responsabilità è trattata come consapevolezza operativa.</a:t>
             </a:r>
             <a:endParaRPr lang="en-US" dirty="0"/>
           </a:p>
@@ -7298,7 +7300,7 @@
           <a:p>
             <a:r>
               <a:rPr lang="en-US" dirty="0"/>
-              <a:t>Con il Tema 7 si conclude l'area 'Interagire con l'AI', che ha seguito l'intero ciclo dell'interazione: il dialogo e la collaborazione nel Tema 5, la formulazione delle richieste nel Tema 6, la valutazione e la verifica dei risultati in questo tema. Insieme all'area 'Comprendere l'AI', costituisce la base di competenze trasversali del percorso. Con il Tema 8 si apre una nuova area, 'Esplorare le possibilità dell'AI', che guarda a che cosa si può fare concretamente nei diversi ambiti di lavoro. Il Tema 8 è dedicato all'AI per testi, documenti e conoscenza: generare e trasformare testi, sintetizzare e analizzare documenti, estrarre informazioni strutturate, confrontare documenti, fare ricerca e interrogare raccolte documentali. Seguirà il Tema 9, dedicato all'AI per dati e analisi. In tutti questi ambiti, la capacità di valutare, verificare e decidere costruita in questo modulo sarà applicata a contenuti concreti: la fedeltà di una sintesi, l'accuratezza di un'estrazione, la tracciabilità verso le fonti. Lasciare spazio alle domande finali.</a:t>
+              <a:t>Chiudiamo con sei errori tipici nella verifica degli output, uno per ciascuno dei principali messaggi del modulo. Primo: 'è scritto bene, quindi è giusto'. La qualità espressiva è quasi sempre alta e non dice nulla sulla sostanza. Secondo: 'c'è la fonte, quindi è vero'. Una citazione non è una prova: la fonte deve esistere, essere pertinente e sostenere davvero l'affermazione. Terzo: 'i numeri tornano', senza averli ricalcolati. Un risultato quantitativo che serve a decidere va ricondotto a dati e procedimenti controllabili, con uno strumento indipendente. Quarto: 'gliel'ho chiesto due volte'. Chiedere conferma allo stesso sistema non è una verifica indipendente: può confermare l'errore o cambiare una risposta giusta. Quinto: 'verifico solo ciò che non mi convince'. È il bias di conferma: la verifica deve essere ugualmente severa con ciò che ci piace. Sesto: 'verifico tutto allo stesso modo'. La verifica va proporzionata a probabilità e impatto dell'errore: né controlli indiscriminati, né controlli insufficienti per gli usi critici. Suggerimento: chiedere ai partecipanti quale di questi errori hanno visto più spesso, in sé o negli altri.</a:t>
             </a:r>
             <a:endParaRPr lang="en-US" dirty="0"/>
           </a:p>
@@ -7386,7 +7388,7 @@
           <a:p>
             <a:r>
               <a:rPr lang="en-US" dirty="0"/>
-              <a:t>Le fonti citate nel modulo, oltre ai rimandi ai temi precedenti. Il modulo si basa soprattutto su principi consolidati di pensiero critico, analisi delle fonti e lettura dei dati, che non dipendono da una singola fonte. Prima di ogni edizione è consigliabile verificare se ci sono casi recenti o studi utili da aggiungere, in particolare sull'efficacia della revisione assistita dall'AI, che è un campo in rapida evoluzione.</a:t>
+              <a:t>Con il Tema 7 si conclude l'area 'Interagire con l'AI', che ha seguito l'intero ciclo dell'interazione: il dialogo e la collaborazione nel Tema 5, la formulazione delle richieste nel Tema 6, la valutazione e la verifica dei risultati in questo tema. Insieme all'area 'Comprendere l'AI', costituisce la base di competenze trasversali del percorso. Con il Tema 8 si apre una nuova area, 'Esplorare le possibilità dell'AI', che guarda a che cosa si può fare concretamente nei diversi ambiti di lavoro. Il Tema 8 è dedicato all'AI per testi, documenti e conoscenza: generare e trasformare testi, sintetizzare e analizzare documenti, estrarre informazioni strutturate, confrontare documenti, fare ricerca e interrogare raccolte documentali. Seguirà il Tema 9, dedicato all'AI per dati e analisi. In tutti questi ambiti, la capacità di valutare, verificare e decidere costruita in questo modulo sarà applicata a contenuti concreti: la fedeltà di una sintesi, l'accuratezza di un'estrazione, la tracciabilità verso le fonti. Lasciare spazio alle domande finali. Slide facoltativa: se il modulo è presentato da solo o in una selezione di slide, può essere nascosta o tolta senza perdere nulla del contenuto.</a:t>
             </a:r>
             <a:endParaRPr lang="en-US" dirty="0"/>
           </a:p>
@@ -7410,6 +7412,94 @@
             <a:fld id="{F7021451-1387-4CA6-816F-3879F97B5CBC}" type="slidenum">
               <a:rPr lang="en-US"/>
               <a:t>73</a:t>
+            </a:fld>
+            <a:endParaRPr lang="en-US"/>
+          </a:p>
+        </p:txBody>
+      </p:sp>
+    </p:spTree>
+    <p:extLst>
+      <p:ext uri="{BB962C8B-B14F-4D97-AF65-F5344CB8AC3E}">
+        <p14:creationId xmlns:p14="http://schemas.microsoft.com/office/powerpoint/2010/main" val="1024086991"/>
+      </p:ext>
+    </p:extLst>
+  </p:cSld>
+  <p:clrMapOvr>
+    <a:masterClrMapping/>
+  </p:clrMapOvr>
+</p:notes>
+</file>
+
+<file path=ppt/notesSlides/notesSlide74.xml><?xml version="1.0" encoding="utf-8"?>
+<p:notes xmlns:a="http://schemas.openxmlformats.org/drawingml/2006/main" xmlns:r="http://schemas.openxmlformats.org/officeDocument/2006/relationships" xmlns:p="http://schemas.openxmlformats.org/presentationml/2006/main">
+  <p:cSld>
+    <p:spTree>
+      <p:nvGrpSpPr>
+        <p:cNvPr id="1" name=""/>
+        <p:cNvGrpSpPr/>
+        <p:nvPr/>
+      </p:nvGrpSpPr>
+      <p:grpSpPr>
+        <a:xfrm>
+          <a:off x="0" y="0"/>
+          <a:ext cx="0" cy="0"/>
+          <a:chOff x="0" y="0"/>
+          <a:chExt cx="0" cy="0"/>
+        </a:xfrm>
+      </p:grpSpPr>
+      <p:sp>
+        <p:nvSpPr>
+          <p:cNvPr id="2" name="Slide Image Placeholder 1"/>
+          <p:cNvSpPr>
+            <a:spLocks noGrp="1" noRot="1" noChangeAspect="1"/>
+          </p:cNvSpPr>
+          <p:nvPr>
+            <p:ph type="sldImg"/>
+          </p:nvPr>
+        </p:nvSpPr>
+        <p:spPr/>
+      </p:sp>
+      <p:sp>
+        <p:nvSpPr>
+          <p:cNvPr id="3" name="Notes Placeholder 2"/>
+          <p:cNvSpPr>
+            <a:spLocks noGrp="1"/>
+          </p:cNvSpPr>
+          <p:nvPr>
+            <p:ph type="body" idx="1"/>
+          </p:nvPr>
+        </p:nvSpPr>
+        <p:spPr/>
+        <p:txBody>
+          <a:bodyPr/>
+          <a:lstStyle/>
+          <a:p>
+            <a:r>
+              <a:rPr lang="en-US" dirty="0"/>
+              <a:t>Le fonti citate nel modulo. Il caso Avianca e lo studio di Sharma e colleghi sono già presentati nel Tema 3 (affidabilità e compiacenza), qui richiamati. Le pagine di Reber e Schwarz sono indicate a memoria: da verificare. Il modulo si basa soprattutto su principi consolidati di pensiero critico, analisi delle fonti e lettura dei dati, che non dipendono da una singola fonte. Prima di ogni edizione è consigliabile verificare se ci sono casi recenti o studi utili da aggiungere, in particolare sull'efficacia della revisione assistita dall'AI, che è un campo in rapida evoluzione.</a:t>
+            </a:r>
+            <a:endParaRPr lang="en-US" dirty="0"/>
+          </a:p>
+        </p:txBody>
+      </p:sp>
+      <p:sp>
+        <p:nvSpPr>
+          <p:cNvPr id="4" name="Slide Number Placeholder 3"/>
+          <p:cNvSpPr>
+            <a:spLocks noGrp="1"/>
+          </p:cNvSpPr>
+          <p:nvPr>
+            <p:ph type="sldNum" sz="quarter" idx="10"/>
+          </p:nvPr>
+        </p:nvSpPr>
+        <p:spPr/>
+        <p:txBody>
+          <a:bodyPr/>
+          <a:lstStyle/>
+          <a:p>
+            <a:fld id="{F7021451-1387-4CA6-816F-3879F97B5CBC}" type="slidenum">
+              <a:rPr lang="en-US"/>
+              <a:t>74</a:t>
             </a:fld>
             <a:endParaRPr lang="en-US"/>
           </a:p>
@@ -8849,6 +8939,42 @@
           </a:p>
         </p:txBody>
       </p:sp>
+      <p:sp>
+        <p:nvSpPr>
+          <p:cNvPr id="5" name="Text 3"/>
+          <p:cNvSpPr txBox="1"/>
+          <p:nvPr/>
+        </p:nvSpPr>
+        <p:spPr>
+          <a:xfrm>
+            <a:off x="640080" y="4343400"/>
+            <a:ext cx="5486400" cy="274320"/>
+          </a:xfrm>
+          <a:prstGeom prst="rect">
+            <a:avLst/>
+          </a:prstGeom>
+          <a:noFill/>
+          <a:ln/>
+        </p:spPr>
+        <p:txBody>
+          <a:bodyPr wrap="square" lIns="0" tIns="0" rIns="0" bIns="0" rtlCol="0" anchor="t"/>
+          <a:lstStyle/>
+          <a:p>
+            <a:pPr indent="0" marL="0">
+              <a:buNone/>
+            </a:pPr>
+            <a:r>
+              <a:rPr lang="en-US" sz="1100" dirty="0">
+                <a:solidFill>
+                  <a:schemeClr val="accent2"/>
+                </a:solidFill>
+              </a:rPr>
+              <a:t>Contenuti aggiornati a ottobre 2026</a:t>
+            </a:r>
+            <a:endParaRPr lang="en-US" sz="1100" dirty="0"/>
+          </a:p>
+        </p:txBody>
+      </p:sp>
     </p:spTree>
   </p:cSld>
   <p:clrMapOvr>
@@ -15655,7 +15781,7 @@
         <p:spPr>
           <a:xfrm>
             <a:off x="594360" y="1097280"/>
-            <a:ext cx="2011680" cy="548640"/>
+            <a:ext cx="1691640" cy="548640"/>
           </a:xfrm>
           <a:prstGeom prst="rect">
             <a:avLst/>
@@ -15690,8 +15816,8 @@
         </p:nvSpPr>
         <p:spPr>
           <a:xfrm>
-            <a:off x="2560320" y="1097280"/>
-            <a:ext cx="2011680" cy="548640"/>
+            <a:off x="2331720" y="1097280"/>
+            <a:ext cx="2240280" cy="548640"/>
           </a:xfrm>
           <a:prstGeom prst="rect">
             <a:avLst/>
@@ -15727,7 +15853,7 @@
         <p:spPr>
           <a:xfrm>
             <a:off x="457200" y="1737360"/>
-            <a:ext cx="3840480" cy="548640"/>
+            <a:ext cx="3977640" cy="548640"/>
           </a:xfrm>
           <a:prstGeom prst="roundRect">
             <a:avLst>
@@ -15749,6 +15875,42 @@
         <p:spPr>
           <a:xfrm>
             <a:off x="594360" y="1737360"/>
+            <a:ext cx="1691640" cy="548640"/>
+          </a:xfrm>
+          <a:prstGeom prst="rect">
+            <a:avLst/>
+          </a:prstGeom>
+          <a:noFill/>
+          <a:ln/>
+        </p:spPr>
+        <p:txBody>
+          <a:bodyPr wrap="square" lIns="0" tIns="0" rIns="0" bIns="0" rtlCol="0" anchor="ctr"/>
+          <a:lstStyle/>
+          <a:p>
+            <a:pPr indent="0" marL="0">
+              <a:buNone/>
+            </a:pPr>
+            <a:r>
+              <a:rPr lang="en-US" sz="1300" b="1" dirty="0">
+                <a:solidFill>
+                  <a:schemeClr val="tx1"/>
+                </a:solidFill>
+              </a:rPr>
+              <a:t>Affermazioni probabili</a:t>
+            </a:r>
+            <a:endParaRPr lang="en-US" sz="1300" dirty="0"/>
+          </a:p>
+        </p:txBody>
+      </p:sp>
+      <p:sp>
+        <p:nvSpPr>
+          <p:cNvPr id="15" name="Text 12"/>
+          <p:cNvSpPr txBox="1"/>
+          <p:nvPr/>
+        </p:nvSpPr>
+        <p:spPr>
+          <a:xfrm>
+            <a:off x="2331720" y="1737360"/>
             <a:ext cx="2011680" cy="548640"/>
           </a:xfrm>
           <a:prstGeom prst="rect">
@@ -15765,47 +15927,11 @@
               <a:buNone/>
             </a:pPr>
             <a:r>
-              <a:rPr lang="en-US" sz="1300" b="1" dirty="0">
+              <a:rPr lang="en-US" sz="1100" dirty="0">
                 <a:solidFill>
                   <a:schemeClr val="tx1"/>
                 </a:solidFill>
               </a:rPr>
-              <a:t>Affermazioni probabili</a:t>
-            </a:r>
-            <a:endParaRPr lang="en-US" sz="1300" dirty="0"/>
-          </a:p>
-        </p:txBody>
-      </p:sp>
-      <p:sp>
-        <p:nvSpPr>
-          <p:cNvPr id="15" name="Text 12"/>
-          <p:cNvSpPr txBox="1"/>
-          <p:nvPr/>
-        </p:nvSpPr>
-        <p:spPr>
-          <a:xfrm>
-            <a:off x="2560320" y="1737360"/>
-            <a:ext cx="1645920" cy="548640"/>
-          </a:xfrm>
-          <a:prstGeom prst="rect">
-            <a:avLst/>
-          </a:prstGeom>
-          <a:noFill/>
-          <a:ln/>
-        </p:spPr>
-        <p:txBody>
-          <a:bodyPr wrap="square" lIns="0" tIns="0" rIns="0" bIns="0" rtlCol="0" anchor="ctr"/>
-          <a:lstStyle/>
-          <a:p>
-            <a:pPr indent="0" marL="0">
-              <a:buNone/>
-            </a:pPr>
-            <a:r>
-              <a:rPr lang="en-US" sz="1100" dirty="0">
-                <a:solidFill>
-                  <a:schemeClr val="tx1"/>
-                </a:solidFill>
-              </a:rPr>
               <a:t>Plausibili e coerenti, non verificate</a:t>
             </a:r>
             <a:endParaRPr lang="en-US" sz="1100" dirty="0"/>
@@ -15821,7 +15947,7 @@
         <p:spPr>
           <a:xfrm>
             <a:off x="457200" y="2377440"/>
-            <a:ext cx="3474720" cy="548640"/>
+            <a:ext cx="3749040" cy="548640"/>
           </a:xfrm>
           <a:prstGeom prst="roundRect">
             <a:avLst>
@@ -15843,7 +15969,7 @@
         <p:spPr>
           <a:xfrm>
             <a:off x="594360" y="2377440"/>
-            <a:ext cx="2011680" cy="548640"/>
+            <a:ext cx="1691640" cy="548640"/>
           </a:xfrm>
           <a:prstGeom prst="rect">
             <a:avLst/>
@@ -15878,8 +16004,8 @@
         </p:nvSpPr>
         <p:spPr>
           <a:xfrm>
-            <a:off x="2560320" y="2377440"/>
-            <a:ext cx="1280160" cy="548640"/>
+            <a:off x="2331720" y="2377440"/>
+            <a:ext cx="1783080" cy="548640"/>
           </a:xfrm>
           <a:prstGeom prst="rect">
             <a:avLst/>
@@ -15915,7 +16041,7 @@
         <p:spPr>
           <a:xfrm>
             <a:off x="457200" y="3017520"/>
-            <a:ext cx="3108960" cy="548640"/>
+            <a:ext cx="3520440" cy="548640"/>
           </a:xfrm>
           <a:prstGeom prst="roundRect">
             <a:avLst>
@@ -15942,7 +16068,7 @@
         <p:spPr>
           <a:xfrm>
             <a:off x="594360" y="3017520"/>
-            <a:ext cx="2011680" cy="548640"/>
+            <a:ext cx="1691640" cy="548640"/>
           </a:xfrm>
           <a:prstGeom prst="rect">
             <a:avLst/>
@@ -15977,8 +16103,8 @@
         </p:nvSpPr>
         <p:spPr>
           <a:xfrm>
-            <a:off x="2560320" y="3017520"/>
-            <a:ext cx="914400" cy="548640"/>
+            <a:off x="2331720" y="3017520"/>
+            <a:ext cx="1554480" cy="548640"/>
           </a:xfrm>
           <a:prstGeom prst="rect">
             <a:avLst/>
@@ -30094,7 +30220,7 @@
                   <a:schemeClr val="accent3"/>
                 </a:solidFill>
               </a:rPr>
-              <a:t>Sottotema 7.4  ·  Valutazione dei ragionamenti e delle conclusioni</a:t>
+              <a:t>Sottotema 7.4  ·  Valutare ragionamenti e conclusioni</a:t>
             </a:r>
             <a:endParaRPr lang="en-US" sz="1300" dirty="0"/>
           </a:p>
@@ -54145,7 +54271,7 @@
                   <a:schemeClr val="accent3"/>
                 </a:solidFill>
               </a:rPr>
-              <a:t>Sottotema 7.8  ·  Validazione degli output e responsabilità nell'utilizzo</a:t>
+              <a:t>Sottotema 7.8  ·  Validazione e responsabilità nell'uso</a:t>
             </a:r>
             <a:endParaRPr lang="en-US" sz="1300" dirty="0"/>
           </a:p>
@@ -58217,7 +58343,7 @@
                   <a:schemeClr val="tx1"/>
                 </a:solidFill>
               </a:rPr>
-              <a:t>Che cosa viene dopo</a:t>
+              <a:t>Che cosa evitare</a:t>
             </a:r>
             <a:endParaRPr lang="en-US" sz="2600" dirty="0"/>
           </a:p>
@@ -58225,18 +58351,18 @@
       </p:sp>
       <p:sp>
         <p:nvSpPr>
-          <p:cNvPr id="4" name="aree completate"/>
-          <p:cNvSpPr/>
-          <p:nvPr/>
-        </p:nvSpPr>
-        <p:spPr>
-          <a:xfrm>
-            <a:off x="457200" y="1097280"/>
-            <a:ext cx="3977640" cy="3429000"/>
+          <p:cNvPr id="4" name="evitare 1"/>
+          <p:cNvSpPr/>
+          <p:nvPr/>
+        </p:nvSpPr>
+        <p:spPr>
+          <a:xfrm>
+            <a:off x="457200" y="1051560"/>
+            <a:ext cx="4023360" cy="1024128"/>
           </a:xfrm>
           <a:prstGeom prst="roundRect">
             <a:avLst>
-              <a:gd name="adj" fmla="val 2133"/>
+              <a:gd name="adj" fmla="val 7143"/>
             </a:avLst>
           </a:prstGeom>
           <a:solidFill>
@@ -58247,14 +58373,94 @@
       </p:sp>
       <p:sp>
         <p:nvSpPr>
-          <p:cNvPr id="5" name="Text 2"/>
-          <p:cNvSpPr txBox="1"/>
-          <p:nvPr/>
-        </p:nvSpPr>
-        <p:spPr>
-          <a:xfrm>
-            <a:off x="685800" y="1261872"/>
-            <a:ext cx="3566160" cy="274320"/>
+          <p:cNvPr id="5" name="cerchio FiFeather"/>
+          <p:cNvSpPr/>
+          <p:nvPr/>
+        </p:nvSpPr>
+        <p:spPr>
+          <a:xfrm>
+            <a:off x="621792" y="1216152"/>
+            <a:ext cx="457200" cy="457200"/>
+          </a:xfrm>
+          <a:prstGeom prst="ellipse">
+            <a:avLst/>
+          </a:prstGeom>
+          <a:solidFill>
+            <a:schemeClr val="accent5"/>
+          </a:solidFill>
+          <a:ln/>
+        </p:spPr>
+      </p:sp>
+      <p:pic>
+        <p:nvPicPr>
+          <p:cNvPr id="6" name="Image 0" descr="FiFeather">    </p:cNvPr>
+          <p:cNvPicPr>
+            <a:picLocks noChangeAspect="1"/>
+          </p:cNvPicPr>
+          <p:nvPr/>
+        </p:nvPicPr>
+        <p:blipFill>
+          <a:blip r:embed="rId1"/>
+          <a:stretch>
+            <a:fillRect/>
+          </a:stretch>
+        </p:blipFill>
+        <p:spPr>
+          <a:xfrm>
+            <a:off x="736092" y="1330452"/>
+            <a:ext cx="228600" cy="228600"/>
+          </a:xfrm>
+          <a:prstGeom prst="rect">
+            <a:avLst/>
+          </a:prstGeom>
+        </p:spPr>
+      </p:pic>
+      <p:sp>
+        <p:nvSpPr>
+          <p:cNvPr id="7" name="Text 3"/>
+          <p:cNvSpPr txBox="1"/>
+          <p:nvPr/>
+        </p:nvSpPr>
+        <p:spPr>
+          <a:xfrm>
+            <a:off x="1188720" y="1143000"/>
+            <a:ext cx="2743200" cy="502920"/>
+          </a:xfrm>
+          <a:prstGeom prst="rect">
+            <a:avLst/>
+          </a:prstGeom>
+          <a:noFill/>
+          <a:ln/>
+        </p:spPr>
+        <p:txBody>
+          <a:bodyPr wrap="square" lIns="0" tIns="0" rIns="0" bIns="0" rtlCol="0" anchor="ctr"/>
+          <a:lstStyle/>
+          <a:p>
+            <a:pPr indent="0" marL="0">
+              <a:buNone/>
+            </a:pPr>
+            <a:r>
+              <a:rPr lang="en-US" sz="1300" b="1" dirty="0">
+                <a:solidFill>
+                  <a:schemeClr val="tx1"/>
+                </a:solidFill>
+              </a:rPr>
+              <a:t>"È scritto bene, quindi è giusto"</a:t>
+            </a:r>
+            <a:endParaRPr lang="en-US" sz="1300" dirty="0"/>
+          </a:p>
+        </p:txBody>
+      </p:sp>
+      <p:sp>
+        <p:nvSpPr>
+          <p:cNvPr id="8" name="Text 4"/>
+          <p:cNvSpPr txBox="1"/>
+          <p:nvPr/>
+        </p:nvSpPr>
+        <p:spPr>
+          <a:xfrm>
+            <a:off x="1188720" y="1655064"/>
+            <a:ext cx="2743200" cy="347472"/>
           </a:xfrm>
           <a:prstGeom prst="rect">
             <a:avLst/>
@@ -58270,12 +58476,12 @@
               <a:buNone/>
             </a:pPr>
             <a:r>
-              <a:rPr lang="en-US" sz="1200" b="1" spc="200" kern="0" dirty="0">
-                <a:solidFill>
-                  <a:schemeClr val="accent2"/>
-                </a:solidFill>
-              </a:rPr>
-              <a:t>AREE COMPLETATE</a:t>
+              <a:rPr lang="en-US" sz="1200" dirty="0">
+                <a:solidFill>
+                  <a:schemeClr val="tx2"/>
+                </a:solidFill>
+              </a:rPr>
+              <a:t>La forma non dice nulla sulla sostanza</a:t>
             </a:r>
             <a:endParaRPr lang="en-US" sz="1200" dirty="0"/>
           </a:p>
@@ -58283,14 +58489,14 @@
       </p:sp>
       <p:sp>
         <p:nvSpPr>
-          <p:cNvPr id="6" name="Text 3"/>
-          <p:cNvSpPr txBox="1"/>
-          <p:nvPr/>
-        </p:nvSpPr>
-        <p:spPr>
-          <a:xfrm>
-            <a:off x="685800" y="1600200"/>
-            <a:ext cx="3566160" cy="320040"/>
+          <p:cNvPr id="9" name="Text 5"/>
+          <p:cNvSpPr txBox="1"/>
+          <p:nvPr/>
+        </p:nvSpPr>
+        <p:spPr>
+          <a:xfrm>
+            <a:off x="3886200" y="1143000"/>
+            <a:ext cx="457200" cy="365760"/>
           </a:xfrm>
           <a:prstGeom prst="rect">
             <a:avLst/>
@@ -58302,161 +58508,133 @@
           <a:bodyPr wrap="square" lIns="0" tIns="0" rIns="0" bIns="0" rtlCol="0" anchor="t"/>
           <a:lstStyle/>
           <a:p>
-            <a:pPr indent="0" marL="0">
-              <a:buNone/>
-            </a:pPr>
-            <a:r>
-              <a:rPr lang="en-US" sz="1500" b="1" dirty="0">
-                <a:solidFill>
-                  <a:schemeClr val="tx1"/>
-                </a:solidFill>
-              </a:rPr>
-              <a:t>Comprendere l'AI</a:t>
-            </a:r>
-            <a:endParaRPr lang="en-US" sz="1500" dirty="0"/>
-          </a:p>
-        </p:txBody>
-      </p:sp>
-      <p:sp>
-        <p:nvSpPr>
-          <p:cNvPr id="7" name="Text 4"/>
-          <p:cNvSpPr txBox="1"/>
-          <p:nvPr/>
-        </p:nvSpPr>
-        <p:spPr>
-          <a:xfrm>
-            <a:off x="685800" y="1920240"/>
-            <a:ext cx="3566160" cy="548640"/>
-          </a:xfrm>
-          <a:prstGeom prst="rect">
-            <a:avLst/>
-          </a:prstGeom>
-          <a:noFill/>
-          <a:ln/>
-        </p:spPr>
-        <p:txBody>
-          <a:bodyPr wrap="square" lIns="0" tIns="0" rIns="0" bIns="0" rtlCol="0" anchor="t"/>
-          <a:lstStyle/>
-          <a:p>
-            <a:pPr indent="0" marL="0">
-              <a:buNone/>
-            </a:pPr>
-            <a:r>
-              <a:rPr lang="en-US" sz="1200" dirty="0">
-                <a:solidFill>
-                  <a:schemeClr val="tx2"/>
-                </a:solidFill>
-              </a:rPr>
-              <a:t>Temi 1-4: rilevanza, funzionamento, affidabilità, ecosistema</a:t>
-            </a:r>
-            <a:endParaRPr lang="en-US" sz="1200" dirty="0"/>
-          </a:p>
-        </p:txBody>
-      </p:sp>
-      <p:sp>
-        <p:nvSpPr>
-          <p:cNvPr id="8" name="Text 5"/>
-          <p:cNvSpPr txBox="1"/>
-          <p:nvPr/>
-        </p:nvSpPr>
-        <p:spPr>
-          <a:xfrm>
-            <a:off x="685800" y="2606040"/>
-            <a:ext cx="3566160" cy="320040"/>
-          </a:xfrm>
-          <a:prstGeom prst="rect">
-            <a:avLst/>
-          </a:prstGeom>
-          <a:noFill/>
-          <a:ln/>
-        </p:spPr>
-        <p:txBody>
-          <a:bodyPr wrap="square" lIns="0" tIns="0" rIns="0" bIns="0" rtlCol="0" anchor="t"/>
-          <a:lstStyle/>
-          <a:p>
-            <a:pPr indent="0" marL="0">
-              <a:buNone/>
-            </a:pPr>
-            <a:r>
-              <a:rPr lang="en-US" sz="1500" b="1" dirty="0">
-                <a:solidFill>
-                  <a:schemeClr val="tx1"/>
-                </a:solidFill>
-              </a:rPr>
-              <a:t>Interagire con l'AI</a:t>
-            </a:r>
-            <a:endParaRPr lang="en-US" sz="1500" dirty="0"/>
-          </a:p>
-        </p:txBody>
-      </p:sp>
-      <p:sp>
-        <p:nvSpPr>
-          <p:cNvPr id="9" name="Text 6"/>
-          <p:cNvSpPr txBox="1"/>
-          <p:nvPr/>
-        </p:nvSpPr>
-        <p:spPr>
-          <a:xfrm>
-            <a:off x="685800" y="2926080"/>
-            <a:ext cx="3566160" cy="548640"/>
-          </a:xfrm>
-          <a:prstGeom prst="rect">
-            <a:avLst/>
-          </a:prstGeom>
-          <a:noFill/>
-          <a:ln/>
-        </p:spPr>
-        <p:txBody>
-          <a:bodyPr wrap="square" lIns="0" tIns="0" rIns="0" bIns="0" rtlCol="0" anchor="t"/>
-          <a:lstStyle/>
-          <a:p>
-            <a:pPr indent="0" marL="0">
-              <a:buNone/>
-            </a:pPr>
-            <a:r>
-              <a:rPr lang="en-US" sz="1200" dirty="0">
-                <a:solidFill>
-                  <a:schemeClr val="tx2"/>
-                </a:solidFill>
-              </a:rPr>
-              <a:t>Temi 5-7: dialogo, prompting, verifica e pensiero critico</a:t>
-            </a:r>
-            <a:endParaRPr lang="en-US" sz="1200" dirty="0"/>
-          </a:p>
-        </p:txBody>
-      </p:sp>
-      <p:sp>
-        <p:nvSpPr>
-          <p:cNvPr id="10" name="prossimi"/>
-          <p:cNvSpPr/>
-          <p:nvPr/>
-        </p:nvSpPr>
-        <p:spPr>
-          <a:xfrm>
-            <a:off x="4709160" y="1097280"/>
-            <a:ext cx="3977640" cy="3429000"/>
+            <a:pPr algn="r" indent="0" marL="0">
+              <a:buNone/>
+            </a:pPr>
+            <a:r>
+              <a:rPr lang="en-US" sz="1100" b="1" dirty="0">
+                <a:solidFill>
+                  <a:schemeClr val="accent1"/>
+                </a:solidFill>
+              </a:rPr>
+              <a:t>7.2</a:t>
+            </a:r>
+            <a:endParaRPr lang="en-US" sz="1100" dirty="0"/>
+          </a:p>
+        </p:txBody>
+      </p:sp>
+      <p:sp>
+        <p:nvSpPr>
+          <p:cNvPr id="10" name="evitare 2"/>
+          <p:cNvSpPr/>
+          <p:nvPr/>
+        </p:nvSpPr>
+        <p:spPr>
+          <a:xfrm>
+            <a:off x="4663440" y="1051560"/>
+            <a:ext cx="4023360" cy="1024128"/>
           </a:xfrm>
           <a:prstGeom prst="roundRect">
             <a:avLst>
-              <a:gd name="adj" fmla="val 2133"/>
+              <a:gd name="adj" fmla="val 7143"/>
             </a:avLst>
           </a:prstGeom>
           <a:solidFill>
-            <a:schemeClr val="tx1"/>
+            <a:schemeClr val="bg2"/>
           </a:solidFill>
           <a:ln/>
         </p:spPr>
       </p:sp>
       <p:sp>
         <p:nvSpPr>
-          <p:cNvPr id="11" name="Text 8"/>
-          <p:cNvSpPr txBox="1"/>
-          <p:nvPr/>
-        </p:nvSpPr>
-        <p:spPr>
-          <a:xfrm>
-            <a:off x="4937760" y="1261872"/>
-            <a:ext cx="3566160" cy="274320"/>
+          <p:cNvPr id="11" name="cerchio FiLink"/>
+          <p:cNvSpPr/>
+          <p:nvPr/>
+        </p:nvSpPr>
+        <p:spPr>
+          <a:xfrm>
+            <a:off x="4828032" y="1216152"/>
+            <a:ext cx="457200" cy="457200"/>
+          </a:xfrm>
+          <a:prstGeom prst="ellipse">
+            <a:avLst/>
+          </a:prstGeom>
+          <a:solidFill>
+            <a:schemeClr val="accent5"/>
+          </a:solidFill>
+          <a:ln/>
+        </p:spPr>
+      </p:sp>
+      <p:pic>
+        <p:nvPicPr>
+          <p:cNvPr id="12" name="Image 1" descr="FiLink">    </p:cNvPr>
+          <p:cNvPicPr>
+            <a:picLocks noChangeAspect="1"/>
+          </p:cNvPicPr>
+          <p:nvPr/>
+        </p:nvPicPr>
+        <p:blipFill>
+          <a:blip r:embed="rId2"/>
+          <a:stretch>
+            <a:fillRect/>
+          </a:stretch>
+        </p:blipFill>
+        <p:spPr>
+          <a:xfrm>
+            <a:off x="4942332" y="1330452"/>
+            <a:ext cx="228600" cy="228600"/>
+          </a:xfrm>
+          <a:prstGeom prst="rect">
+            <a:avLst/>
+          </a:prstGeom>
+        </p:spPr>
+      </p:pic>
+      <p:sp>
+        <p:nvSpPr>
+          <p:cNvPr id="13" name="Text 8"/>
+          <p:cNvSpPr txBox="1"/>
+          <p:nvPr/>
+        </p:nvSpPr>
+        <p:spPr>
+          <a:xfrm>
+            <a:off x="5394960" y="1143000"/>
+            <a:ext cx="2743200" cy="502920"/>
+          </a:xfrm>
+          <a:prstGeom prst="rect">
+            <a:avLst/>
+          </a:prstGeom>
+          <a:noFill/>
+          <a:ln/>
+        </p:spPr>
+        <p:txBody>
+          <a:bodyPr wrap="square" lIns="0" tIns="0" rIns="0" bIns="0" rtlCol="0" anchor="ctr"/>
+          <a:lstStyle/>
+          <a:p>
+            <a:pPr indent="0" marL="0">
+              <a:buNone/>
+            </a:pPr>
+            <a:r>
+              <a:rPr lang="en-US" sz="1300" b="1" dirty="0">
+                <a:solidFill>
+                  <a:schemeClr val="tx1"/>
+                </a:solidFill>
+              </a:rPr>
+              <a:t>"C'è la fonte, quindi è vero"</a:t>
+            </a:r>
+            <a:endParaRPr lang="en-US" sz="1300" dirty="0"/>
+          </a:p>
+        </p:txBody>
+      </p:sp>
+      <p:sp>
+        <p:nvSpPr>
+          <p:cNvPr id="14" name="Text 9"/>
+          <p:cNvSpPr txBox="1"/>
+          <p:nvPr/>
+        </p:nvSpPr>
+        <p:spPr>
+          <a:xfrm>
+            <a:off x="5394960" y="1655064"/>
+            <a:ext cx="2743200" cy="347472"/>
           </a:xfrm>
           <a:prstGeom prst="rect">
             <a:avLst/>
@@ -58472,12 +58650,186 @@
               <a:buNone/>
             </a:pPr>
             <a:r>
-              <a:rPr lang="en-US" sz="1200" b="1" spc="200" kern="0" dirty="0">
+              <a:rPr lang="en-US" sz="1200" dirty="0">
+                <a:solidFill>
+                  <a:schemeClr val="tx2"/>
+                </a:solidFill>
+              </a:rPr>
+              <a:t>Autentica, pertinente, di supporto</a:t>
+            </a:r>
+            <a:endParaRPr lang="en-US" sz="1200" dirty="0"/>
+          </a:p>
+        </p:txBody>
+      </p:sp>
+      <p:sp>
+        <p:nvSpPr>
+          <p:cNvPr id="15" name="Text 10"/>
+          <p:cNvSpPr txBox="1"/>
+          <p:nvPr/>
+        </p:nvSpPr>
+        <p:spPr>
+          <a:xfrm>
+            <a:off x="8092440" y="1143000"/>
+            <a:ext cx="457200" cy="365760"/>
+          </a:xfrm>
+          <a:prstGeom prst="rect">
+            <a:avLst/>
+          </a:prstGeom>
+          <a:noFill/>
+          <a:ln/>
+        </p:spPr>
+        <p:txBody>
+          <a:bodyPr wrap="square" lIns="0" tIns="0" rIns="0" bIns="0" rtlCol="0" anchor="t"/>
+          <a:lstStyle/>
+          <a:p>
+            <a:pPr algn="r" indent="0" marL="0">
+              <a:buNone/>
+            </a:pPr>
+            <a:r>
+              <a:rPr lang="en-US" sz="1100" b="1" dirty="0">
                 <a:solidFill>
                   <a:schemeClr val="accent1"/>
                 </a:solidFill>
               </a:rPr>
-              <a:t>NUOVA AREA</a:t>
+              <a:t>7.3</a:t>
+            </a:r>
+            <a:endParaRPr lang="en-US" sz="1100" dirty="0"/>
+          </a:p>
+        </p:txBody>
+      </p:sp>
+      <p:sp>
+        <p:nvSpPr>
+          <p:cNvPr id="16" name="evitare 3"/>
+          <p:cNvSpPr/>
+          <p:nvPr/>
+        </p:nvSpPr>
+        <p:spPr>
+          <a:xfrm>
+            <a:off x="457200" y="2212848"/>
+            <a:ext cx="4023360" cy="1024128"/>
+          </a:xfrm>
+          <a:prstGeom prst="roundRect">
+            <a:avLst>
+              <a:gd name="adj" fmla="val 7143"/>
+            </a:avLst>
+          </a:prstGeom>
+          <a:solidFill>
+            <a:schemeClr val="accent6"/>
+          </a:solidFill>
+          <a:ln/>
+        </p:spPr>
+      </p:sp>
+      <p:sp>
+        <p:nvSpPr>
+          <p:cNvPr id="17" name="cerchio FiHash"/>
+          <p:cNvSpPr/>
+          <p:nvPr/>
+        </p:nvSpPr>
+        <p:spPr>
+          <a:xfrm>
+            <a:off x="621792" y="2377440"/>
+            <a:ext cx="457200" cy="457200"/>
+          </a:xfrm>
+          <a:prstGeom prst="ellipse">
+            <a:avLst/>
+          </a:prstGeom>
+          <a:solidFill>
+            <a:schemeClr val="accent5"/>
+          </a:solidFill>
+          <a:ln/>
+        </p:spPr>
+      </p:sp>
+      <p:pic>
+        <p:nvPicPr>
+          <p:cNvPr id="18" name="Image 2" descr="FiHash">    </p:cNvPr>
+          <p:cNvPicPr>
+            <a:picLocks noChangeAspect="1"/>
+          </p:cNvPicPr>
+          <p:nvPr/>
+        </p:nvPicPr>
+        <p:blipFill>
+          <a:blip r:embed="rId3"/>
+          <a:stretch>
+            <a:fillRect/>
+          </a:stretch>
+        </p:blipFill>
+        <p:spPr>
+          <a:xfrm>
+            <a:off x="736092" y="2491740"/>
+            <a:ext cx="228600" cy="228600"/>
+          </a:xfrm>
+          <a:prstGeom prst="rect">
+            <a:avLst/>
+          </a:prstGeom>
+        </p:spPr>
+      </p:pic>
+      <p:sp>
+        <p:nvSpPr>
+          <p:cNvPr id="19" name="Text 13"/>
+          <p:cNvSpPr txBox="1"/>
+          <p:nvPr/>
+        </p:nvSpPr>
+        <p:spPr>
+          <a:xfrm>
+            <a:off x="1188720" y="2304288"/>
+            <a:ext cx="2743200" cy="502920"/>
+          </a:xfrm>
+          <a:prstGeom prst="rect">
+            <a:avLst/>
+          </a:prstGeom>
+          <a:noFill/>
+          <a:ln/>
+        </p:spPr>
+        <p:txBody>
+          <a:bodyPr wrap="square" lIns="0" tIns="0" rIns="0" bIns="0" rtlCol="0" anchor="ctr"/>
+          <a:lstStyle/>
+          <a:p>
+            <a:pPr indent="0" marL="0">
+              <a:buNone/>
+            </a:pPr>
+            <a:r>
+              <a:rPr lang="en-US" sz="1300" b="1" dirty="0">
+                <a:solidFill>
+                  <a:schemeClr val="tx1"/>
+                </a:solidFill>
+              </a:rPr>
+              <a:t>"I numeri tornano"</a:t>
+            </a:r>
+            <a:endParaRPr lang="en-US" sz="1300" dirty="0"/>
+          </a:p>
+        </p:txBody>
+      </p:sp>
+      <p:sp>
+        <p:nvSpPr>
+          <p:cNvPr id="20" name="Text 14"/>
+          <p:cNvSpPr txBox="1"/>
+          <p:nvPr/>
+        </p:nvSpPr>
+        <p:spPr>
+          <a:xfrm>
+            <a:off x="1188720" y="2816352"/>
+            <a:ext cx="2743200" cy="347472"/>
+          </a:xfrm>
+          <a:prstGeom prst="rect">
+            <a:avLst/>
+          </a:prstGeom>
+          <a:noFill/>
+          <a:ln/>
+        </p:spPr>
+        <p:txBody>
+          <a:bodyPr wrap="square" lIns="0" tIns="0" rIns="0" bIns="0" rtlCol="0" anchor="t"/>
+          <a:lstStyle/>
+          <a:p>
+            <a:pPr indent="0" marL="0">
+              <a:buNone/>
+            </a:pPr>
+            <a:r>
+              <a:rPr lang="en-US" sz="1200" dirty="0">
+                <a:solidFill>
+                  <a:schemeClr val="tx2"/>
+                </a:solidFill>
+              </a:rPr>
+              <a:t>Ricalcolare con uno strumento indipendente</a:t>
             </a:r>
             <a:endParaRPr lang="en-US" sz="1200" dirty="0"/>
           </a:p>
@@ -58485,14 +58837,14 @@
       </p:sp>
       <p:sp>
         <p:nvSpPr>
-          <p:cNvPr id="12" name="Text 9"/>
-          <p:cNvSpPr txBox="1"/>
-          <p:nvPr/>
-        </p:nvSpPr>
-        <p:spPr>
-          <a:xfrm>
-            <a:off x="4937760" y="1572768"/>
-            <a:ext cx="3566160" cy="365760"/>
+          <p:cNvPr id="21" name="Text 15"/>
+          <p:cNvSpPr txBox="1"/>
+          <p:nvPr/>
+        </p:nvSpPr>
+        <p:spPr>
+          <a:xfrm>
+            <a:off x="3886200" y="2304288"/>
+            <a:ext cx="457200" cy="365760"/>
           </a:xfrm>
           <a:prstGeom prst="rect">
             <a:avLst/>
@@ -58504,31 +58856,133 @@
           <a:bodyPr wrap="square" lIns="0" tIns="0" rIns="0" bIns="0" rtlCol="0" anchor="t"/>
           <a:lstStyle/>
           <a:p>
+            <a:pPr algn="r" indent="0" marL="0">
+              <a:buNone/>
+            </a:pPr>
+            <a:r>
+              <a:rPr lang="en-US" sz="1100" b="1" dirty="0">
+                <a:solidFill>
+                  <a:schemeClr val="accent1"/>
+                </a:solidFill>
+              </a:rPr>
+              <a:t>7.5</a:t>
+            </a:r>
+            <a:endParaRPr lang="en-US" sz="1100" dirty="0"/>
+          </a:p>
+        </p:txBody>
+      </p:sp>
+      <p:sp>
+        <p:nvSpPr>
+          <p:cNvPr id="22" name="evitare 4"/>
+          <p:cNvSpPr/>
+          <p:nvPr/>
+        </p:nvSpPr>
+        <p:spPr>
+          <a:xfrm>
+            <a:off x="4663440" y="2212848"/>
+            <a:ext cx="4023360" cy="1024128"/>
+          </a:xfrm>
+          <a:prstGeom prst="roundRect">
+            <a:avLst>
+              <a:gd name="adj" fmla="val 7143"/>
+            </a:avLst>
+          </a:prstGeom>
+          <a:solidFill>
+            <a:schemeClr val="accent6"/>
+          </a:solidFill>
+          <a:ln/>
+        </p:spPr>
+      </p:sp>
+      <p:sp>
+        <p:nvSpPr>
+          <p:cNvPr id="23" name="cerchio FiRepeat"/>
+          <p:cNvSpPr/>
+          <p:nvPr/>
+        </p:nvSpPr>
+        <p:spPr>
+          <a:xfrm>
+            <a:off x="4828032" y="2377440"/>
+            <a:ext cx="457200" cy="457200"/>
+          </a:xfrm>
+          <a:prstGeom prst="ellipse">
+            <a:avLst/>
+          </a:prstGeom>
+          <a:solidFill>
+            <a:schemeClr val="accent5"/>
+          </a:solidFill>
+          <a:ln/>
+        </p:spPr>
+      </p:sp>
+      <p:pic>
+        <p:nvPicPr>
+          <p:cNvPr id="24" name="Image 3" descr="FiRepeat">    </p:cNvPr>
+          <p:cNvPicPr>
+            <a:picLocks noChangeAspect="1"/>
+          </p:cNvPicPr>
+          <p:nvPr/>
+        </p:nvPicPr>
+        <p:blipFill>
+          <a:blip r:embed="rId4"/>
+          <a:stretch>
+            <a:fillRect/>
+          </a:stretch>
+        </p:blipFill>
+        <p:spPr>
+          <a:xfrm>
+            <a:off x="4942332" y="2491740"/>
+            <a:ext cx="228600" cy="228600"/>
+          </a:xfrm>
+          <a:prstGeom prst="rect">
+            <a:avLst/>
+          </a:prstGeom>
+        </p:spPr>
+      </p:pic>
+      <p:sp>
+        <p:nvSpPr>
+          <p:cNvPr id="25" name="Text 18"/>
+          <p:cNvSpPr txBox="1"/>
+          <p:nvPr/>
+        </p:nvSpPr>
+        <p:spPr>
+          <a:xfrm>
+            <a:off x="5394960" y="2304288"/>
+            <a:ext cx="2743200" cy="502920"/>
+          </a:xfrm>
+          <a:prstGeom prst="rect">
+            <a:avLst/>
+          </a:prstGeom>
+          <a:noFill/>
+          <a:ln/>
+        </p:spPr>
+        <p:txBody>
+          <a:bodyPr wrap="square" lIns="0" tIns="0" rIns="0" bIns="0" rtlCol="0" anchor="ctr"/>
+          <a:lstStyle/>
+          <a:p>
             <a:pPr indent="0" marL="0">
               <a:buNone/>
             </a:pPr>
             <a:r>
-              <a:rPr lang="en-US" sz="1500" b="1" dirty="0">
-                <a:solidFill>
-                  <a:schemeClr val="bg1"/>
-                </a:solidFill>
-              </a:rPr>
-              <a:t>Esplorare le possibilità dell'AI</a:t>
-            </a:r>
-            <a:endParaRPr lang="en-US" sz="1500" dirty="0"/>
-          </a:p>
-        </p:txBody>
-      </p:sp>
-      <p:sp>
-        <p:nvSpPr>
-          <p:cNvPr id="13" name="Text 10"/>
-          <p:cNvSpPr txBox="1"/>
-          <p:nvPr/>
-        </p:nvSpPr>
-        <p:spPr>
-          <a:xfrm>
-            <a:off x="4937760" y="2011680"/>
-            <a:ext cx="3566160" cy="548640"/>
+              <a:rPr lang="en-US" sz="1300" b="1" dirty="0">
+                <a:solidFill>
+                  <a:schemeClr val="tx1"/>
+                </a:solidFill>
+              </a:rPr>
+              <a:t>"Gliel'ho chiesto due volte"</a:t>
+            </a:r>
+            <a:endParaRPr lang="en-US" sz="1300" dirty="0"/>
+          </a:p>
+        </p:txBody>
+      </p:sp>
+      <p:sp>
+        <p:nvSpPr>
+          <p:cNvPr id="26" name="Text 19"/>
+          <p:cNvSpPr txBox="1"/>
+          <p:nvPr/>
+        </p:nvSpPr>
+        <p:spPr>
+          <a:xfrm>
+            <a:off x="5394960" y="2816352"/>
+            <a:ext cx="2743200" cy="347472"/>
           </a:xfrm>
           <a:prstGeom prst="rect">
             <a:avLst/>
@@ -58544,27 +58998,27 @@
               <a:buNone/>
             </a:pPr>
             <a:r>
-              <a:rPr lang="en-US" sz="1400" b="1" dirty="0">
-                <a:solidFill>
-                  <a:schemeClr val="accent6"/>
-                </a:solidFill>
-              </a:rPr>
-              <a:t>Tema 8: AI per testi, documenti e conoscenza</a:t>
-            </a:r>
-            <a:endParaRPr lang="en-US" sz="1400" dirty="0"/>
-          </a:p>
-        </p:txBody>
-      </p:sp>
-      <p:sp>
-        <p:nvSpPr>
-          <p:cNvPr id="14" name="Text 11"/>
-          <p:cNvSpPr txBox="1"/>
-          <p:nvPr/>
-        </p:nvSpPr>
-        <p:spPr>
-          <a:xfrm>
-            <a:off x="4937760" y="2606040"/>
-            <a:ext cx="3566160" cy="1097280"/>
+              <a:rPr lang="en-US" sz="1200" dirty="0">
+                <a:solidFill>
+                  <a:schemeClr val="tx2"/>
+                </a:solidFill>
+              </a:rPr>
+              <a:t>Chiedere conferma non è verificare</a:t>
+            </a:r>
+            <a:endParaRPr lang="en-US" sz="1200" dirty="0"/>
+          </a:p>
+        </p:txBody>
+      </p:sp>
+      <p:sp>
+        <p:nvSpPr>
+          <p:cNvPr id="27" name="Text 20"/>
+          <p:cNvSpPr txBox="1"/>
+          <p:nvPr/>
+        </p:nvSpPr>
+        <p:spPr>
+          <a:xfrm>
+            <a:off x="8092440" y="2304288"/>
+            <a:ext cx="457200" cy="365760"/>
           </a:xfrm>
           <a:prstGeom prst="rect">
             <a:avLst/>
@@ -58576,71 +59030,343 @@
           <a:bodyPr wrap="square" lIns="0" tIns="0" rIns="0" bIns="0" rtlCol="0" anchor="t"/>
           <a:lstStyle/>
           <a:p>
-            <a:pPr marL="177800" indent="-177800">
-              <a:spcAft>
-                <a:spcPts val="500"/>
-              </a:spcAft>
-              <a:buSzPct val="100000"/>
-              <a:buChar char="•"/>
+            <a:pPr algn="r" indent="0" marL="0">
+              <a:buNone/>
+            </a:pPr>
+            <a:r>
+              <a:rPr lang="en-US" sz="1100" b="1" dirty="0">
+                <a:solidFill>
+                  <a:schemeClr val="accent1"/>
+                </a:solidFill>
+              </a:rPr>
+              <a:t>7.6</a:t>
+            </a:r>
+            <a:endParaRPr lang="en-US" sz="1100" dirty="0"/>
+          </a:p>
+        </p:txBody>
+      </p:sp>
+      <p:sp>
+        <p:nvSpPr>
+          <p:cNvPr id="28" name="evitare 5"/>
+          <p:cNvSpPr/>
+          <p:nvPr/>
+        </p:nvSpPr>
+        <p:spPr>
+          <a:xfrm>
+            <a:off x="457200" y="3374136"/>
+            <a:ext cx="4023360" cy="1024128"/>
+          </a:xfrm>
+          <a:prstGeom prst="roundRect">
+            <a:avLst>
+              <a:gd name="adj" fmla="val 7143"/>
+            </a:avLst>
+          </a:prstGeom>
+          <a:solidFill>
+            <a:schemeClr val="bg2"/>
+          </a:solidFill>
+          <a:ln/>
+        </p:spPr>
+      </p:sp>
+      <p:sp>
+        <p:nvSpPr>
+          <p:cNvPr id="29" name="cerchio FiThumbsUp"/>
+          <p:cNvSpPr/>
+          <p:nvPr/>
+        </p:nvSpPr>
+        <p:spPr>
+          <a:xfrm>
+            <a:off x="621792" y="3538728"/>
+            <a:ext cx="457200" cy="457200"/>
+          </a:xfrm>
+          <a:prstGeom prst="ellipse">
+            <a:avLst/>
+          </a:prstGeom>
+          <a:solidFill>
+            <a:schemeClr val="accent5"/>
+          </a:solidFill>
+          <a:ln/>
+        </p:spPr>
+      </p:sp>
+      <p:pic>
+        <p:nvPicPr>
+          <p:cNvPr id="30" name="Image 4" descr="FiThumbsUp">    </p:cNvPr>
+          <p:cNvPicPr>
+            <a:picLocks noChangeAspect="1"/>
+          </p:cNvPicPr>
+          <p:nvPr/>
+        </p:nvPicPr>
+        <p:blipFill>
+          <a:blip r:embed="rId5"/>
+          <a:stretch>
+            <a:fillRect/>
+          </a:stretch>
+        </p:blipFill>
+        <p:spPr>
+          <a:xfrm>
+            <a:off x="736092" y="3653028"/>
+            <a:ext cx="228600" cy="228600"/>
+          </a:xfrm>
+          <a:prstGeom prst="rect">
+            <a:avLst/>
+          </a:prstGeom>
+        </p:spPr>
+      </p:pic>
+      <p:sp>
+        <p:nvSpPr>
+          <p:cNvPr id="31" name="Text 23"/>
+          <p:cNvSpPr txBox="1"/>
+          <p:nvPr/>
+        </p:nvSpPr>
+        <p:spPr>
+          <a:xfrm>
+            <a:off x="1188720" y="3465576"/>
+            <a:ext cx="2743200" cy="502920"/>
+          </a:xfrm>
+          <a:prstGeom prst="rect">
+            <a:avLst/>
+          </a:prstGeom>
+          <a:noFill/>
+          <a:ln/>
+        </p:spPr>
+        <p:txBody>
+          <a:bodyPr wrap="square" lIns="0" tIns="0" rIns="0" bIns="0" rtlCol="0" anchor="ctr"/>
+          <a:lstStyle/>
+          <a:p>
+            <a:pPr indent="0" marL="0">
+              <a:buNone/>
+            </a:pPr>
+            <a:r>
+              <a:rPr lang="en-US" sz="1300" b="1" dirty="0">
+                <a:solidFill>
+                  <a:schemeClr val="tx1"/>
+                </a:solidFill>
+              </a:rPr>
+              <a:t>"Verifico ciò che non mi convince"</a:t>
+            </a:r>
+            <a:endParaRPr lang="en-US" sz="1300" dirty="0"/>
+          </a:p>
+        </p:txBody>
+      </p:sp>
+      <p:sp>
+        <p:nvSpPr>
+          <p:cNvPr id="32" name="Text 24"/>
+          <p:cNvSpPr txBox="1"/>
+          <p:nvPr/>
+        </p:nvSpPr>
+        <p:spPr>
+          <a:xfrm>
+            <a:off x="1188720" y="3977640"/>
+            <a:ext cx="2743200" cy="347472"/>
+          </a:xfrm>
+          <a:prstGeom prst="rect">
+            <a:avLst/>
+          </a:prstGeom>
+          <a:noFill/>
+          <a:ln/>
+        </p:spPr>
+        <p:txBody>
+          <a:bodyPr wrap="square" lIns="0" tIns="0" rIns="0" bIns="0" rtlCol="0" anchor="t"/>
+          <a:lstStyle/>
+          <a:p>
+            <a:pPr indent="0" marL="0">
+              <a:buNone/>
             </a:pPr>
             <a:r>
               <a:rPr lang="en-US" sz="1200" dirty="0">
                 <a:solidFill>
-                  <a:schemeClr val="bg1"/>
-                </a:solidFill>
-              </a:rPr>
-              <a:t>Generare e trasformare testi</a:t>
+                  <a:schemeClr val="tx2"/>
+                </a:solidFill>
+              </a:rPr>
+              <a:t>Stessa severità con ciò che piace</a:t>
             </a:r>
             <a:endParaRPr lang="en-US" sz="1200" dirty="0"/>
           </a:p>
-          <a:p>
-            <a:pPr marL="177800" indent="-177800">
-              <a:spcAft>
-                <a:spcPts val="500"/>
-              </a:spcAft>
-              <a:buSzPct val="100000"/>
-              <a:buChar char="•"/>
+        </p:txBody>
+      </p:sp>
+      <p:sp>
+        <p:nvSpPr>
+          <p:cNvPr id="33" name="Text 25"/>
+          <p:cNvSpPr txBox="1"/>
+          <p:nvPr/>
+        </p:nvSpPr>
+        <p:spPr>
+          <a:xfrm>
+            <a:off x="3886200" y="3465576"/>
+            <a:ext cx="457200" cy="365760"/>
+          </a:xfrm>
+          <a:prstGeom prst="rect">
+            <a:avLst/>
+          </a:prstGeom>
+          <a:noFill/>
+          <a:ln/>
+        </p:spPr>
+        <p:txBody>
+          <a:bodyPr wrap="square" lIns="0" tIns="0" rIns="0" bIns="0" rtlCol="0" anchor="t"/>
+          <a:lstStyle/>
+          <a:p>
+            <a:pPr algn="r" indent="0" marL="0">
+              <a:buNone/>
+            </a:pPr>
+            <a:r>
+              <a:rPr lang="en-US" sz="1100" b="1" dirty="0">
+                <a:solidFill>
+                  <a:schemeClr val="accent1"/>
+                </a:solidFill>
+              </a:rPr>
+              <a:t>7.7</a:t>
+            </a:r>
+            <a:endParaRPr lang="en-US" sz="1100" dirty="0"/>
+          </a:p>
+        </p:txBody>
+      </p:sp>
+      <p:sp>
+        <p:nvSpPr>
+          <p:cNvPr id="34" name="evitare 6"/>
+          <p:cNvSpPr/>
+          <p:nvPr/>
+        </p:nvSpPr>
+        <p:spPr>
+          <a:xfrm>
+            <a:off x="4663440" y="3374136"/>
+            <a:ext cx="4023360" cy="1024128"/>
+          </a:xfrm>
+          <a:prstGeom prst="roundRect">
+            <a:avLst>
+              <a:gd name="adj" fmla="val 7143"/>
+            </a:avLst>
+          </a:prstGeom>
+          <a:solidFill>
+            <a:schemeClr val="bg2"/>
+          </a:solidFill>
+          <a:ln/>
+        </p:spPr>
+      </p:sp>
+      <p:sp>
+        <p:nvSpPr>
+          <p:cNvPr id="35" name="cerchio FiSliders"/>
+          <p:cNvSpPr/>
+          <p:nvPr/>
+        </p:nvSpPr>
+        <p:spPr>
+          <a:xfrm>
+            <a:off x="4828032" y="3538728"/>
+            <a:ext cx="457200" cy="457200"/>
+          </a:xfrm>
+          <a:prstGeom prst="ellipse">
+            <a:avLst/>
+          </a:prstGeom>
+          <a:solidFill>
+            <a:schemeClr val="accent5"/>
+          </a:solidFill>
+          <a:ln/>
+        </p:spPr>
+      </p:sp>
+      <p:pic>
+        <p:nvPicPr>
+          <p:cNvPr id="36" name="Image 5" descr="FiSliders">    </p:cNvPr>
+          <p:cNvPicPr>
+            <a:picLocks noChangeAspect="1"/>
+          </p:cNvPicPr>
+          <p:nvPr/>
+        </p:nvPicPr>
+        <p:blipFill>
+          <a:blip r:embed="rId6"/>
+          <a:stretch>
+            <a:fillRect/>
+          </a:stretch>
+        </p:blipFill>
+        <p:spPr>
+          <a:xfrm>
+            <a:off x="4942332" y="3653028"/>
+            <a:ext cx="228600" cy="228600"/>
+          </a:xfrm>
+          <a:prstGeom prst="rect">
+            <a:avLst/>
+          </a:prstGeom>
+        </p:spPr>
+      </p:pic>
+      <p:sp>
+        <p:nvSpPr>
+          <p:cNvPr id="37" name="Text 28"/>
+          <p:cNvSpPr txBox="1"/>
+          <p:nvPr/>
+        </p:nvSpPr>
+        <p:spPr>
+          <a:xfrm>
+            <a:off x="5394960" y="3465576"/>
+            <a:ext cx="2743200" cy="502920"/>
+          </a:xfrm>
+          <a:prstGeom prst="rect">
+            <a:avLst/>
+          </a:prstGeom>
+          <a:noFill/>
+          <a:ln/>
+        </p:spPr>
+        <p:txBody>
+          <a:bodyPr wrap="square" lIns="0" tIns="0" rIns="0" bIns="0" rtlCol="0" anchor="ctr"/>
+          <a:lstStyle/>
+          <a:p>
+            <a:pPr indent="0" marL="0">
+              <a:buNone/>
+            </a:pPr>
+            <a:r>
+              <a:rPr lang="en-US" sz="1300" b="1" dirty="0">
+                <a:solidFill>
+                  <a:schemeClr val="tx1"/>
+                </a:solidFill>
+              </a:rPr>
+              <a:t>"Verifico tutto allo stesso modo"</a:t>
+            </a:r>
+            <a:endParaRPr lang="en-US" sz="1300" dirty="0"/>
+          </a:p>
+        </p:txBody>
+      </p:sp>
+      <p:sp>
+        <p:nvSpPr>
+          <p:cNvPr id="38" name="Text 29"/>
+          <p:cNvSpPr txBox="1"/>
+          <p:nvPr/>
+        </p:nvSpPr>
+        <p:spPr>
+          <a:xfrm>
+            <a:off x="5394960" y="3977640"/>
+            <a:ext cx="2743200" cy="347472"/>
+          </a:xfrm>
+          <a:prstGeom prst="rect">
+            <a:avLst/>
+          </a:prstGeom>
+          <a:noFill/>
+          <a:ln/>
+        </p:spPr>
+        <p:txBody>
+          <a:bodyPr wrap="square" lIns="0" tIns="0" rIns="0" bIns="0" rtlCol="0" anchor="t"/>
+          <a:lstStyle/>
+          <a:p>
+            <a:pPr indent="0" marL="0">
+              <a:buNone/>
             </a:pPr>
             <a:r>
               <a:rPr lang="en-US" sz="1200" dirty="0">
                 <a:solidFill>
-                  <a:schemeClr val="bg1"/>
-                </a:solidFill>
-              </a:rPr>
-              <a:t>Sintesi, estrazione, confronto</a:t>
+                  <a:schemeClr val="tx2"/>
+                </a:solidFill>
+              </a:rPr>
+              <a:t>Controlli proporzionati al rischio</a:t>
             </a:r>
             <a:endParaRPr lang="en-US" sz="1200" dirty="0"/>
           </a:p>
-          <a:p>
-            <a:pPr marL="177800" indent="-177800">
-              <a:spcAft>
-                <a:spcPts val="500"/>
-              </a:spcAft>
-              <a:buSzPct val="100000"/>
-              <a:buChar char="•"/>
-            </a:pPr>
-            <a:r>
-              <a:rPr lang="en-US" sz="1200" dirty="0">
-                <a:solidFill>
-                  <a:schemeClr val="bg1"/>
-                </a:solidFill>
-              </a:rPr>
-              <a:t>Ricerca e conoscenza interrogabile</a:t>
-            </a:r>
-            <a:endParaRPr lang="en-US" sz="1200" dirty="0"/>
-          </a:p>
-        </p:txBody>
-      </p:sp>
-      <p:sp>
-        <p:nvSpPr>
-          <p:cNvPr id="15" name="Text 12"/>
-          <p:cNvSpPr txBox="1"/>
-          <p:nvPr/>
-        </p:nvSpPr>
-        <p:spPr>
-          <a:xfrm>
-            <a:off x="4937760" y="3931920"/>
-            <a:ext cx="3566160" cy="320040"/>
+        </p:txBody>
+      </p:sp>
+      <p:sp>
+        <p:nvSpPr>
+          <p:cNvPr id="39" name="Text 30"/>
+          <p:cNvSpPr txBox="1"/>
+          <p:nvPr/>
+        </p:nvSpPr>
+        <p:spPr>
+          <a:xfrm>
+            <a:off x="8092440" y="3465576"/>
+            <a:ext cx="457200" cy="365760"/>
           </a:xfrm>
           <a:prstGeom prst="rect">
             <a:avLst/>
@@ -58652,18 +59378,18 @@
           <a:bodyPr wrap="square" lIns="0" tIns="0" rIns="0" bIns="0" rtlCol="0" anchor="t"/>
           <a:lstStyle/>
           <a:p>
-            <a:pPr indent="0" marL="0">
-              <a:buNone/>
-            </a:pPr>
-            <a:r>
-              <a:rPr lang="en-US" sz="1200" i="1" dirty="0">
-                <a:solidFill>
-                  <a:schemeClr val="accent3"/>
-                </a:solidFill>
-              </a:rPr>
-              <a:t>Poi il Tema 9: AI per dati e analisi</a:t>
-            </a:r>
-            <a:endParaRPr lang="en-US" sz="1200" dirty="0"/>
+            <a:pPr algn="r" indent="0" marL="0">
+              <a:buNone/>
+            </a:pPr>
+            <a:r>
+              <a:rPr lang="en-US" sz="1100" b="1" dirty="0">
+                <a:solidFill>
+                  <a:schemeClr val="accent1"/>
+                </a:solidFill>
+              </a:rPr>
+              <a:t>7.8</a:t>
+            </a:r>
+            <a:endParaRPr lang="en-US" sz="1100" dirty="0"/>
           </a:p>
         </p:txBody>
       </p:sp>
@@ -58769,6 +59495,558 @@
                   <a:schemeClr val="tx1"/>
                 </a:solidFill>
               </a:rPr>
+              <a:t>Che cosa viene dopo</a:t>
+            </a:r>
+            <a:endParaRPr lang="en-US" sz="2600" dirty="0"/>
+          </a:p>
+        </p:txBody>
+      </p:sp>
+      <p:sp>
+        <p:nvSpPr>
+          <p:cNvPr id="4" name="aree completate"/>
+          <p:cNvSpPr/>
+          <p:nvPr/>
+        </p:nvSpPr>
+        <p:spPr>
+          <a:xfrm>
+            <a:off x="457200" y="1097280"/>
+            <a:ext cx="3977640" cy="3429000"/>
+          </a:xfrm>
+          <a:prstGeom prst="roundRect">
+            <a:avLst>
+              <a:gd name="adj" fmla="val 2133"/>
+            </a:avLst>
+          </a:prstGeom>
+          <a:solidFill>
+            <a:schemeClr val="bg2"/>
+          </a:solidFill>
+          <a:ln/>
+        </p:spPr>
+      </p:sp>
+      <p:sp>
+        <p:nvSpPr>
+          <p:cNvPr id="5" name="Text 2"/>
+          <p:cNvSpPr txBox="1"/>
+          <p:nvPr/>
+        </p:nvSpPr>
+        <p:spPr>
+          <a:xfrm>
+            <a:off x="685800" y="1261872"/>
+            <a:ext cx="3566160" cy="274320"/>
+          </a:xfrm>
+          <a:prstGeom prst="rect">
+            <a:avLst/>
+          </a:prstGeom>
+          <a:noFill/>
+          <a:ln/>
+        </p:spPr>
+        <p:txBody>
+          <a:bodyPr wrap="square" lIns="0" tIns="0" rIns="0" bIns="0" rtlCol="0" anchor="t"/>
+          <a:lstStyle/>
+          <a:p>
+            <a:pPr indent="0" marL="0">
+              <a:buNone/>
+            </a:pPr>
+            <a:r>
+              <a:rPr lang="en-US" sz="1200" b="1" spc="200" kern="0" dirty="0">
+                <a:solidFill>
+                  <a:schemeClr val="accent2"/>
+                </a:solidFill>
+              </a:rPr>
+              <a:t>AREE COMPLETATE</a:t>
+            </a:r>
+            <a:endParaRPr lang="en-US" sz="1200" dirty="0"/>
+          </a:p>
+        </p:txBody>
+      </p:sp>
+      <p:sp>
+        <p:nvSpPr>
+          <p:cNvPr id="6" name="Text 3"/>
+          <p:cNvSpPr txBox="1"/>
+          <p:nvPr/>
+        </p:nvSpPr>
+        <p:spPr>
+          <a:xfrm>
+            <a:off x="685800" y="1600200"/>
+            <a:ext cx="3566160" cy="320040"/>
+          </a:xfrm>
+          <a:prstGeom prst="rect">
+            <a:avLst/>
+          </a:prstGeom>
+          <a:noFill/>
+          <a:ln/>
+        </p:spPr>
+        <p:txBody>
+          <a:bodyPr wrap="square" lIns="0" tIns="0" rIns="0" bIns="0" rtlCol="0" anchor="t"/>
+          <a:lstStyle/>
+          <a:p>
+            <a:pPr indent="0" marL="0">
+              <a:buNone/>
+            </a:pPr>
+            <a:r>
+              <a:rPr lang="en-US" sz="1500" b="1" dirty="0">
+                <a:solidFill>
+                  <a:schemeClr val="tx1"/>
+                </a:solidFill>
+              </a:rPr>
+              <a:t>Comprendere l'AI</a:t>
+            </a:r>
+            <a:endParaRPr lang="en-US" sz="1500" dirty="0"/>
+          </a:p>
+        </p:txBody>
+      </p:sp>
+      <p:sp>
+        <p:nvSpPr>
+          <p:cNvPr id="7" name="Text 4"/>
+          <p:cNvSpPr txBox="1"/>
+          <p:nvPr/>
+        </p:nvSpPr>
+        <p:spPr>
+          <a:xfrm>
+            <a:off x="685800" y="1920240"/>
+            <a:ext cx="3566160" cy="548640"/>
+          </a:xfrm>
+          <a:prstGeom prst="rect">
+            <a:avLst/>
+          </a:prstGeom>
+          <a:noFill/>
+          <a:ln/>
+        </p:spPr>
+        <p:txBody>
+          <a:bodyPr wrap="square" lIns="0" tIns="0" rIns="0" bIns="0" rtlCol="0" anchor="t"/>
+          <a:lstStyle/>
+          <a:p>
+            <a:pPr indent="0" marL="0">
+              <a:buNone/>
+            </a:pPr>
+            <a:r>
+              <a:rPr lang="en-US" sz="1200" dirty="0">
+                <a:solidFill>
+                  <a:schemeClr val="tx2"/>
+                </a:solidFill>
+              </a:rPr>
+              <a:t>Temi 1-4: rilevanza, funzionamento, affidabilità, ecosistema</a:t>
+            </a:r>
+            <a:endParaRPr lang="en-US" sz="1200" dirty="0"/>
+          </a:p>
+        </p:txBody>
+      </p:sp>
+      <p:sp>
+        <p:nvSpPr>
+          <p:cNvPr id="8" name="Text 5"/>
+          <p:cNvSpPr txBox="1"/>
+          <p:nvPr/>
+        </p:nvSpPr>
+        <p:spPr>
+          <a:xfrm>
+            <a:off x="685800" y="2606040"/>
+            <a:ext cx="3566160" cy="320040"/>
+          </a:xfrm>
+          <a:prstGeom prst="rect">
+            <a:avLst/>
+          </a:prstGeom>
+          <a:noFill/>
+          <a:ln/>
+        </p:spPr>
+        <p:txBody>
+          <a:bodyPr wrap="square" lIns="0" tIns="0" rIns="0" bIns="0" rtlCol="0" anchor="t"/>
+          <a:lstStyle/>
+          <a:p>
+            <a:pPr indent="0" marL="0">
+              <a:buNone/>
+            </a:pPr>
+            <a:r>
+              <a:rPr lang="en-US" sz="1500" b="1" dirty="0">
+                <a:solidFill>
+                  <a:schemeClr val="tx1"/>
+                </a:solidFill>
+              </a:rPr>
+              <a:t>Interagire con l'AI</a:t>
+            </a:r>
+            <a:endParaRPr lang="en-US" sz="1500" dirty="0"/>
+          </a:p>
+        </p:txBody>
+      </p:sp>
+      <p:sp>
+        <p:nvSpPr>
+          <p:cNvPr id="9" name="Text 6"/>
+          <p:cNvSpPr txBox="1"/>
+          <p:nvPr/>
+        </p:nvSpPr>
+        <p:spPr>
+          <a:xfrm>
+            <a:off x="685800" y="2926080"/>
+            <a:ext cx="3566160" cy="548640"/>
+          </a:xfrm>
+          <a:prstGeom prst="rect">
+            <a:avLst/>
+          </a:prstGeom>
+          <a:noFill/>
+          <a:ln/>
+        </p:spPr>
+        <p:txBody>
+          <a:bodyPr wrap="square" lIns="0" tIns="0" rIns="0" bIns="0" rtlCol="0" anchor="t"/>
+          <a:lstStyle/>
+          <a:p>
+            <a:pPr indent="0" marL="0">
+              <a:buNone/>
+            </a:pPr>
+            <a:r>
+              <a:rPr lang="en-US" sz="1200" dirty="0">
+                <a:solidFill>
+                  <a:schemeClr val="tx2"/>
+                </a:solidFill>
+              </a:rPr>
+              <a:t>Temi 5-7: dialogo, prompting, verifica e pensiero critico</a:t>
+            </a:r>
+            <a:endParaRPr lang="en-US" sz="1200" dirty="0"/>
+          </a:p>
+        </p:txBody>
+      </p:sp>
+      <p:sp>
+        <p:nvSpPr>
+          <p:cNvPr id="10" name="prossimi"/>
+          <p:cNvSpPr/>
+          <p:nvPr/>
+        </p:nvSpPr>
+        <p:spPr>
+          <a:xfrm>
+            <a:off x="4709160" y="1097280"/>
+            <a:ext cx="3977640" cy="3429000"/>
+          </a:xfrm>
+          <a:prstGeom prst="roundRect">
+            <a:avLst>
+              <a:gd name="adj" fmla="val 2133"/>
+            </a:avLst>
+          </a:prstGeom>
+          <a:solidFill>
+            <a:schemeClr val="tx1"/>
+          </a:solidFill>
+          <a:ln/>
+        </p:spPr>
+      </p:sp>
+      <p:sp>
+        <p:nvSpPr>
+          <p:cNvPr id="11" name="Text 8"/>
+          <p:cNvSpPr txBox="1"/>
+          <p:nvPr/>
+        </p:nvSpPr>
+        <p:spPr>
+          <a:xfrm>
+            <a:off x="4937760" y="1261872"/>
+            <a:ext cx="3566160" cy="274320"/>
+          </a:xfrm>
+          <a:prstGeom prst="rect">
+            <a:avLst/>
+          </a:prstGeom>
+          <a:noFill/>
+          <a:ln/>
+        </p:spPr>
+        <p:txBody>
+          <a:bodyPr wrap="square" lIns="0" tIns="0" rIns="0" bIns="0" rtlCol="0" anchor="t"/>
+          <a:lstStyle/>
+          <a:p>
+            <a:pPr indent="0" marL="0">
+              <a:buNone/>
+            </a:pPr>
+            <a:r>
+              <a:rPr lang="en-US" sz="1200" b="1" spc="200" kern="0" dirty="0">
+                <a:solidFill>
+                  <a:schemeClr val="accent1"/>
+                </a:solidFill>
+              </a:rPr>
+              <a:t>NUOVA AREA</a:t>
+            </a:r>
+            <a:endParaRPr lang="en-US" sz="1200" dirty="0"/>
+          </a:p>
+        </p:txBody>
+      </p:sp>
+      <p:sp>
+        <p:nvSpPr>
+          <p:cNvPr id="12" name="Text 9"/>
+          <p:cNvSpPr txBox="1"/>
+          <p:nvPr/>
+        </p:nvSpPr>
+        <p:spPr>
+          <a:xfrm>
+            <a:off x="4937760" y="1572768"/>
+            <a:ext cx="3566160" cy="365760"/>
+          </a:xfrm>
+          <a:prstGeom prst="rect">
+            <a:avLst/>
+          </a:prstGeom>
+          <a:noFill/>
+          <a:ln/>
+        </p:spPr>
+        <p:txBody>
+          <a:bodyPr wrap="square" lIns="0" tIns="0" rIns="0" bIns="0" rtlCol="0" anchor="t"/>
+          <a:lstStyle/>
+          <a:p>
+            <a:pPr indent="0" marL="0">
+              <a:buNone/>
+            </a:pPr>
+            <a:r>
+              <a:rPr lang="en-US" sz="1500" b="1" dirty="0">
+                <a:solidFill>
+                  <a:schemeClr val="bg1"/>
+                </a:solidFill>
+              </a:rPr>
+              <a:t>Esplorare le possibilità dell'AI</a:t>
+            </a:r>
+            <a:endParaRPr lang="en-US" sz="1500" dirty="0"/>
+          </a:p>
+        </p:txBody>
+      </p:sp>
+      <p:sp>
+        <p:nvSpPr>
+          <p:cNvPr id="13" name="Text 10"/>
+          <p:cNvSpPr txBox="1"/>
+          <p:nvPr/>
+        </p:nvSpPr>
+        <p:spPr>
+          <a:xfrm>
+            <a:off x="4937760" y="2011680"/>
+            <a:ext cx="3566160" cy="548640"/>
+          </a:xfrm>
+          <a:prstGeom prst="rect">
+            <a:avLst/>
+          </a:prstGeom>
+          <a:noFill/>
+          <a:ln/>
+        </p:spPr>
+        <p:txBody>
+          <a:bodyPr wrap="square" lIns="0" tIns="0" rIns="0" bIns="0" rtlCol="0" anchor="t"/>
+          <a:lstStyle/>
+          <a:p>
+            <a:pPr indent="0" marL="0">
+              <a:buNone/>
+            </a:pPr>
+            <a:r>
+              <a:rPr lang="en-US" sz="1400" b="1" dirty="0">
+                <a:solidFill>
+                  <a:schemeClr val="accent6"/>
+                </a:solidFill>
+              </a:rPr>
+              <a:t>Tema 8: AI per testi, documenti e conoscenza</a:t>
+            </a:r>
+            <a:endParaRPr lang="en-US" sz="1400" dirty="0"/>
+          </a:p>
+        </p:txBody>
+      </p:sp>
+      <p:sp>
+        <p:nvSpPr>
+          <p:cNvPr id="14" name="Text 11"/>
+          <p:cNvSpPr txBox="1"/>
+          <p:nvPr/>
+        </p:nvSpPr>
+        <p:spPr>
+          <a:xfrm>
+            <a:off x="4937760" y="2606040"/>
+            <a:ext cx="3566160" cy="1097280"/>
+          </a:xfrm>
+          <a:prstGeom prst="rect">
+            <a:avLst/>
+          </a:prstGeom>
+          <a:noFill/>
+          <a:ln/>
+        </p:spPr>
+        <p:txBody>
+          <a:bodyPr wrap="square" lIns="0" tIns="0" rIns="0" bIns="0" rtlCol="0" anchor="t"/>
+          <a:lstStyle/>
+          <a:p>
+            <a:pPr marL="177800" indent="-177800">
+              <a:spcAft>
+                <a:spcPts val="500"/>
+              </a:spcAft>
+              <a:buSzPct val="100000"/>
+              <a:buChar char="•"/>
+            </a:pPr>
+            <a:r>
+              <a:rPr lang="en-US" sz="1200" dirty="0">
+                <a:solidFill>
+                  <a:schemeClr val="bg1"/>
+                </a:solidFill>
+              </a:rPr>
+              <a:t>Generare e trasformare testi</a:t>
+            </a:r>
+            <a:endParaRPr lang="en-US" sz="1200" dirty="0"/>
+          </a:p>
+          <a:p>
+            <a:pPr marL="177800" indent="-177800">
+              <a:spcAft>
+                <a:spcPts val="500"/>
+              </a:spcAft>
+              <a:buSzPct val="100000"/>
+              <a:buChar char="•"/>
+            </a:pPr>
+            <a:r>
+              <a:rPr lang="en-US" sz="1200" dirty="0">
+                <a:solidFill>
+                  <a:schemeClr val="bg1"/>
+                </a:solidFill>
+              </a:rPr>
+              <a:t>Sintesi, estrazione, confronto</a:t>
+            </a:r>
+            <a:endParaRPr lang="en-US" sz="1200" dirty="0"/>
+          </a:p>
+          <a:p>
+            <a:pPr marL="177800" indent="-177800">
+              <a:spcAft>
+                <a:spcPts val="500"/>
+              </a:spcAft>
+              <a:buSzPct val="100000"/>
+              <a:buChar char="•"/>
+            </a:pPr>
+            <a:r>
+              <a:rPr lang="en-US" sz="1200" dirty="0">
+                <a:solidFill>
+                  <a:schemeClr val="bg1"/>
+                </a:solidFill>
+              </a:rPr>
+              <a:t>Ricerca e conoscenza interrogabile</a:t>
+            </a:r>
+            <a:endParaRPr lang="en-US" sz="1200" dirty="0"/>
+          </a:p>
+        </p:txBody>
+      </p:sp>
+      <p:sp>
+        <p:nvSpPr>
+          <p:cNvPr id="15" name="Text 12"/>
+          <p:cNvSpPr txBox="1"/>
+          <p:nvPr/>
+        </p:nvSpPr>
+        <p:spPr>
+          <a:xfrm>
+            <a:off x="4937760" y="3931920"/>
+            <a:ext cx="3566160" cy="320040"/>
+          </a:xfrm>
+          <a:prstGeom prst="rect">
+            <a:avLst/>
+          </a:prstGeom>
+          <a:noFill/>
+          <a:ln/>
+        </p:spPr>
+        <p:txBody>
+          <a:bodyPr wrap="square" lIns="0" tIns="0" rIns="0" bIns="0" rtlCol="0" anchor="t"/>
+          <a:lstStyle/>
+          <a:p>
+            <a:pPr indent="0" marL="0">
+              <a:buNone/>
+            </a:pPr>
+            <a:r>
+              <a:rPr lang="en-US" sz="1200" i="1" dirty="0">
+                <a:solidFill>
+                  <a:schemeClr val="accent3"/>
+                </a:solidFill>
+              </a:rPr>
+              <a:t>Poi il Tema 9: AI per dati e analisi</a:t>
+            </a:r>
+            <a:endParaRPr lang="en-US" sz="1200" dirty="0"/>
+          </a:p>
+        </p:txBody>
+      </p:sp>
+      <p:sp>
+        <p:nvSpPr>
+          <p:cNvPr id="25" name="Slide Number Placeholder 0"/>
+          <p:cNvSpPr>
+            <a:spLocks noGrp="1"/>
+          </p:cNvSpPr>
+          <p:nvPr>
+            <p:ph type="sldNum" sz="quarter" idx="4294967295"/>
+          </p:nvPr>
+        </p:nvSpPr>
+        <p:spPr>
+          <a:xfrm>
+            <a:off x="8229600" y="4754880"/>
+            <a:ext cx="457200" cy="228600"/>
+          </a:xfrm>
+          <a:prstGeom prst="rect">
+            <a:avLst/>
+          </a:prstGeom>
+          <a:extLst>
+            <a:ext uri="{C572A759-6A51-4108-AA02-DFA0A04FC94B}">
+              <ma14:wrappingTextBoxFlag xmlns:ma14="http://schemas.microsoft.com/office/mac/drawingml/2011/main" val="0"/>
+            </a:ext>
+          </a:extLst>
+        </p:spPr>
+        <p:txBody>
+          <a:bodyPr/>
+          <a:lstStyle>
+            <a:lvl1pPr>
+              <a:defRPr sz="900">
+                <a:solidFill>
+                  <a:schemeClr val="accent2"/>
+                </a:solidFill>
+              </a:defRPr>
+            </a:lvl1pPr>
+          </a:lstStyle>
+          <a:p>
+            <a:pPr algn="r"/>
+            <a:fld id="{F7021451-1387-4CA6-816F-3879F97B5CBC}" type="slidenum">
+              <a:rPr b="0" lang="en-US"/>
+              <a:t>73</a:t>
+            </a:fld>
+            <a:endParaRPr lang="en-US"/>
+          </a:p>
+        </p:txBody>
+      </p:sp>
+    </p:spTree>
+  </p:cSld>
+  <p:clrMapOvr>
+    <a:masterClrMapping/>
+  </p:clrMapOvr>
+</p:sld>
+</file>
+
+<file path=ppt/slides/slide74.xml><?xml version="1.0" encoding="utf-8"?>
+<p:sld xmlns:a="http://schemas.openxmlformats.org/drawingml/2006/main" xmlns:r="http://schemas.openxmlformats.org/officeDocument/2006/relationships" xmlns:p="http://schemas.openxmlformats.org/presentationml/2006/main">
+  <p:cSld name="Slide 74">
+    <p:spTree>
+      <p:nvGrpSpPr>
+        <p:cNvPr id="1" name=""/>
+        <p:cNvGrpSpPr/>
+        <p:nvPr/>
+      </p:nvGrpSpPr>
+      <p:grpSpPr>
+        <a:xfrm>
+          <a:off x="0" y="0"/>
+          <a:ext cx="0" cy="0"/>
+          <a:chOff x="0" y="0"/>
+          <a:chExt cx="0" cy="0"/>
+        </a:xfrm>
+      </p:grpSpPr>
+      <p:sp>
+        <p:nvSpPr>
+          <p:cNvPr id="2" name="Text 0"/>
+          <p:cNvSpPr/>
+          <p:nvPr>
+            <p:ph idx="100" type="title" hasCustomPrompt="1"/>
+          </p:nvPr>
+        </p:nvSpPr>
+        <p:spPr>
+          <a:xfrm>
+            <a:off x="457200" y="256032"/>
+            <a:ext cx="8229600" cy="640080"/>
+          </a:xfrm>
+          <a:prstGeom prst="rect">
+            <a:avLst/>
+          </a:prstGeom>
+          <a:noFill/>
+          <a:ln/>
+        </p:spPr>
+        <p:txBody>
+          <a:bodyPr wrap="square" lIns="0" tIns="0" rIns="0" bIns="0" rtlCol="0" anchor="ctr"/>
+          <a:lstStyle/>
+          <a:p>
+            <a:pPr algn="l" indent="0" marL="0">
+              <a:buNone/>
+            </a:pPr>
+            <a:r>
+              <a:rPr lang="en-US" sz="2600" b="1" dirty="0">
+                <a:solidFill>
+                  <a:schemeClr val="tx1"/>
+                </a:solidFill>
+              </a:rPr>
               <a:t>Fonti e riferimenti</a:t>
             </a:r>
             <a:endParaRPr lang="en-US" sz="2600" dirty="0"/>
@@ -58853,7 +60131,7 @@
                   <a:schemeClr val="tx1"/>
                 </a:solidFill>
               </a:rPr>
-              <a:t>Reber, R., Schwarz, N. (1999). Effects of Perceptual Fluency on Judgments of Truth. Consciousness and Cognition, 8(3).</a:t>
+              <a:t>Reber, R., Schwarz, N. (1999). Effects of Perceptual Fluency on Judgments of Truth. Consciousness and Cognition, 8(3), 338-342.</a:t>
             </a:r>
             <a:endParaRPr lang="en-US" sz="1300" dirty="0"/>
           </a:p>
@@ -58871,7 +60149,7 @@
                   <a:schemeClr val="tx1"/>
                 </a:solidFill>
               </a:rPr>
-              <a:t>Parasuraman, R., Manzey, D. H. (2010). Complacency and Bias in Human Use of Automation. Human Factors, 52(3).</a:t>
+              <a:t>Parasuraman, R., Manzey, D. H. (2010). Complacency and Bias in Human Use of Automation: An Attentional Integration. Human Factors, 52(3), 381-410.</a:t>
             </a:r>
             <a:endParaRPr lang="en-US" sz="1300" dirty="0"/>
           </a:p>
@@ -58889,7 +60167,7 @@
                   <a:schemeClr val="tx1"/>
                 </a:solidFill>
               </a:rPr>
-              <a:t>Mata v. Avianca, Inc., U.S. District Court, Southern District of New York, 2023 (richiamato dal Tema 3).</a:t>
+              <a:t>Mata v. Avianca, Inc., U.S. District Court, Southern District of New York, giugno 2023.</a:t>
             </a:r>
             <a:endParaRPr lang="en-US" sz="1300" dirty="0"/>
           </a:p>
@@ -58907,9 +60185,45 @@
                   <a:schemeClr val="tx1"/>
                 </a:solidFill>
               </a:rPr>
-              <a:t>Sharma, M. et al. (2023). Towards Understanding Sycophancy in Language Models. Anthropic (richiamato dal Tema 3).</a:t>
+              <a:t>Sharma, M. et al. (2024). Towards Understanding Sycophancy in Language Models. ICLR 2024 (Anthropic).</a:t>
             </a:r>
             <a:endParaRPr lang="en-US" sz="1300" dirty="0"/>
+          </a:p>
+        </p:txBody>
+      </p:sp>
+      <p:sp>
+        <p:nvSpPr>
+          <p:cNvPr id="7" name="Text 3"/>
+          <p:cNvSpPr txBox="1"/>
+          <p:nvPr/>
+        </p:nvSpPr>
+        <p:spPr>
+          <a:xfrm>
+            <a:off x="1188720" y="4297680"/>
+            <a:ext cx="7498080" cy="274320"/>
+          </a:xfrm>
+          <a:prstGeom prst="rect">
+            <a:avLst/>
+          </a:prstGeom>
+          <a:noFill/>
+          <a:ln/>
+        </p:spPr>
+        <p:txBody>
+          <a:bodyPr wrap="square" lIns="0" tIns="0" rIns="0" bIns="0" rtlCol="0" anchor="t"/>
+          <a:lstStyle/>
+          <a:p>
+            <a:pPr indent="0" marL="0">
+              <a:buNone/>
+            </a:pPr>
+            <a:r>
+              <a:rPr lang="en-US" sz="1100" i="1" dirty="0">
+                <a:solidFill>
+                  <a:schemeClr val="accent2"/>
+                </a:solidFill>
+              </a:rPr>
+              <a:t>Fonti verificate a ottobre 2026: ricontrollarle prima di ogni edizione.</a:t>
+            </a:r>
+            <a:endParaRPr lang="en-US" sz="1100" dirty="0"/>
           </a:p>
         </p:txBody>
       </p:sp>
@@ -58952,7 +60266,7 @@
             <a:pPr algn="r"/>
             <a:fld id="{F7021451-1387-4CA6-816F-3879F97B5CBC}" type="slidenum">
               <a:rPr b="0" lang="en-US"/>
-              <a:t>73</a:t>
+              <a:t>74</a:t>
             </a:fld>
             <a:endParaRPr lang="en-US"/>
           </a:p>
